--- a/04-enums and Strings.pptx
+++ b/04-enums and Strings.pptx
@@ -253,7 +253,7 @@
           <a:p>
             <a:fld id="{86D088FE-3E68-47FE-8BA4-634CD34BABBC}" type="datetimeFigureOut">
               <a:rPr lang="en-GB" smtClean="0"/>
-              <a:t>05/12/2025</a:t>
+              <a:t>05/08/2026</a:t>
             </a:fld>
             <a:endParaRPr lang="en-GB"/>
           </a:p>
@@ -418,7 +418,7 @@
           <a:p>
             <a:fld id="{1D6B66C6-1E92-0F4E-A300-9D4ED1F0C23F}" type="datetimeFigureOut">
               <a:rPr lang="en-GB" smtClean="0"/>
-              <a:t>05/12/2025</a:t>
+              <a:t>05/08/2026</a:t>
             </a:fld>
             <a:endParaRPr lang="en-GB"/>
           </a:p>
@@ -1638,13 +1638,13 @@
           <p:nvPr userDrawn="1"/>
         </p:nvPicPr>
         <p:blipFill>
-          <a:blip r:embed="rId2">
+          <a:blip>
             <a:extLst>
               <a:ext uri="{28A0092B-C50C-407E-A947-70E740481C1C}">
                 <a14:useLocalDpi xmlns:a14="http://schemas.microsoft.com/office/drawing/2010/main" val="0"/>
               </a:ext>
               <a:ext uri="{96DAC541-7B7A-43D3-8B79-37D633B846F1}">
-                <asvg:svgBlip xmlns:asvg="http://schemas.microsoft.com/office/drawing/2016/SVG/main" r:embed="rId3"/>
+                <asvg:svgBlip xmlns:asvg="http://schemas.microsoft.com/office/drawing/2016/SVG/main" r:embed="rId2"/>
               </a:ext>
             </a:extLst>
           </a:blip>
@@ -15451,13 +15451,13 @@
           <p:nvPr userDrawn="1"/>
         </p:nvPicPr>
         <p:blipFill>
-          <a:blip r:embed="rId2">
+          <a:blip>
             <a:extLst>
               <a:ext uri="{28A0092B-C50C-407E-A947-70E740481C1C}">
                 <a14:useLocalDpi xmlns:a14="http://schemas.microsoft.com/office/drawing/2010/main" val="0"/>
               </a:ext>
               <a:ext uri="{96DAC541-7B7A-43D3-8B79-37D633B846F1}">
-                <asvg:svgBlip xmlns:asvg="http://schemas.microsoft.com/office/drawing/2016/SVG/main" r:embed="rId3"/>
+                <asvg:svgBlip xmlns:asvg="http://schemas.microsoft.com/office/drawing/2016/SVG/main" r:embed="rId2"/>
               </a:ext>
             </a:extLst>
           </a:blip>
@@ -18292,13 +18292,13 @@
           <p:nvPr userDrawn="1"/>
         </p:nvPicPr>
         <p:blipFill>
-          <a:blip r:embed="rId2">
+          <a:blip>
             <a:extLst>
               <a:ext uri="{28A0092B-C50C-407E-A947-70E740481C1C}">
                 <a14:useLocalDpi xmlns:a14="http://schemas.microsoft.com/office/drawing/2010/main" val="0"/>
               </a:ext>
               <a:ext uri="{96DAC541-7B7A-43D3-8B79-37D633B846F1}">
-                <asvg:svgBlip xmlns:asvg="http://schemas.microsoft.com/office/drawing/2016/SVG/main" r:embed="rId3"/>
+                <asvg:svgBlip xmlns:asvg="http://schemas.microsoft.com/office/drawing/2016/SVG/main" r:embed="rId2"/>
               </a:ext>
             </a:extLst>
           </a:blip>
@@ -19539,13 +19539,13 @@
           <p:nvPr userDrawn="1"/>
         </p:nvPicPr>
         <p:blipFill>
-          <a:blip r:embed="rId2">
+          <a:blip>
             <a:extLst>
               <a:ext uri="{28A0092B-C50C-407E-A947-70E740481C1C}">
                 <a14:useLocalDpi xmlns:a14="http://schemas.microsoft.com/office/drawing/2010/main" val="0"/>
               </a:ext>
               <a:ext uri="{96DAC541-7B7A-43D3-8B79-37D633B846F1}">
-                <asvg:svgBlip xmlns:asvg="http://schemas.microsoft.com/office/drawing/2016/SVG/main" r:embed="rId3"/>
+                <asvg:svgBlip xmlns:asvg="http://schemas.microsoft.com/office/drawing/2016/SVG/main" r:embed="rId2"/>
               </a:ext>
             </a:extLst>
           </a:blip>
@@ -20349,13 +20349,13 @@
           <p:nvPr userDrawn="1"/>
         </p:nvPicPr>
         <p:blipFill>
-          <a:blip r:embed="rId2">
+          <a:blip>
             <a:extLst>
               <a:ext uri="{28A0092B-C50C-407E-A947-70E740481C1C}">
                 <a14:useLocalDpi xmlns:a14="http://schemas.microsoft.com/office/drawing/2010/main" val="0"/>
               </a:ext>
               <a:ext uri="{96DAC541-7B7A-43D3-8B79-37D633B846F1}">
-                <asvg:svgBlip xmlns:asvg="http://schemas.microsoft.com/office/drawing/2016/SVG/main" r:embed="rId3"/>
+                <asvg:svgBlip xmlns:asvg="http://schemas.microsoft.com/office/drawing/2016/SVG/main" r:embed="rId2"/>
               </a:ext>
             </a:extLst>
           </a:blip>
@@ -24160,13 +24160,13 @@
             <a:avLst/>
           </a:prstGeom>
           <a:blipFill>
-            <a:blip r:embed="rId3">
+            <a:blip>
               <a:extLst>
                 <a:ext uri="{28A0092B-C50C-407E-A947-70E740481C1C}">
                   <a14:useLocalDpi xmlns:a14="http://schemas.microsoft.com/office/drawing/2010/main" val="0"/>
                 </a:ext>
                 <a:ext uri="{96DAC541-7B7A-43D3-8B79-37D633B846F1}">
-                  <asvg:svgBlip xmlns:asvg="http://schemas.microsoft.com/office/drawing/2016/SVG/main" r:embed="rId4"/>
+                  <asvg:svgBlip xmlns:asvg="http://schemas.microsoft.com/office/drawing/2016/SVG/main" r:embed="rId3"/>
                 </a:ext>
               </a:extLst>
             </a:blip>
@@ -24226,13 +24226,13 @@
             <a:avLst/>
           </a:prstGeom>
           <a:blipFill>
-            <a:blip r:embed="rId5">
+            <a:blip>
               <a:extLst>
                 <a:ext uri="{28A0092B-C50C-407E-A947-70E740481C1C}">
                   <a14:useLocalDpi xmlns:a14="http://schemas.microsoft.com/office/drawing/2010/main" val="0"/>
                 </a:ext>
                 <a:ext uri="{96DAC541-7B7A-43D3-8B79-37D633B846F1}">
-                  <asvg:svgBlip xmlns:asvg="http://schemas.microsoft.com/office/drawing/2016/SVG/main" r:embed="rId6"/>
+                  <asvg:svgBlip xmlns:asvg="http://schemas.microsoft.com/office/drawing/2016/SVG/main" r:embed="rId4"/>
                 </a:ext>
               </a:extLst>
             </a:blip>
@@ -25246,11 +25246,20 @@
             <a:r>
               <a:rPr lang="en-GB" sz="1600" dirty="0">
                 <a:solidFill>
+                  <a:srgbClr val="2A00FF"/>
+                </a:solidFill>
+                <a:latin typeface="Consolas" panose="020B0609020204030204" pitchFamily="49" charset="0"/>
+              </a:rPr>
+              <a:t>string</a:t>
+            </a:r>
+            <a:r>
+              <a:rPr lang="en-GB" sz="1600" dirty="0">
+                <a:solidFill>
                   <a:srgbClr val="000000"/>
                 </a:solidFill>
                 <a:latin typeface="Consolas" panose="020B0609020204030204" pitchFamily="49" charset="0"/>
               </a:rPr>
-              <a:t>name = </a:t>
+              <a:t> name = </a:t>
             </a:r>
             <a:r>
               <a:rPr lang="en-GB" sz="1600" dirty="0">
@@ -25275,11 +25284,20 @@
             <a:r>
               <a:rPr lang="en-GB" sz="1600" dirty="0">
                 <a:solidFill>
+                  <a:srgbClr val="2A00FF"/>
+                </a:solidFill>
+                <a:latin typeface="Consolas" panose="020B0609020204030204" pitchFamily="49" charset="0"/>
+              </a:rPr>
+              <a:t>string</a:t>
+            </a:r>
+            <a:r>
+              <a:rPr lang="en-GB" sz="1600" dirty="0">
+                <a:solidFill>
                   <a:srgbClr val="000000"/>
                 </a:solidFill>
                 <a:latin typeface="Consolas" panose="020B0609020204030204" pitchFamily="49" charset="0"/>
               </a:rPr>
-              <a:t>String </a:t>
+              <a:t> </a:t>
             </a:r>
             <a:r>
               <a:rPr lang="en-GB" sz="1600" dirty="0">
@@ -31334,6 +31352,15 @@
 </file>
 
 <file path=customXml/item1.xml><?xml version="1.0" encoding="utf-8"?>
+<?mso-contentType ?>
+<FormTemplates xmlns="http://schemas.microsoft.com/sharepoint/v3/contenttype/forms">
+  <Display>DocumentLibraryForm</Display>
+  <Edit>DocumentLibraryForm</Edit>
+  <New>DocumentLibraryForm</New>
+</FormTemplates>
+</file>
+
+<file path=customXml/item2.xml><?xml version="1.0" encoding="utf-8"?>
 <p:properties xmlns:p="http://schemas.microsoft.com/office/2006/metadata/properties" xmlns:xsi="http://www.w3.org/2001/XMLSchema-instance" xmlns:pc="http://schemas.microsoft.com/office/infopath/2007/PartnerControls">
   <documentManagement>
     <SequenceNumber xmlns="6794D9DE-4FDF-4DC0-8B2C-5438320C69D5" xsi:nil="true"/>
@@ -31348,15 +31375,6 @@
     </BookTypeField0>
   </documentManagement>
 </p:properties>
-</file>
-
-<file path=customXml/item2.xml><?xml version="1.0" encoding="utf-8"?>
-<?mso-contentType ?>
-<FormTemplates xmlns="http://schemas.microsoft.com/sharepoint/v3/contenttype/forms">
-  <Display>DocumentLibraryForm</Display>
-  <Edit>DocumentLibraryForm</Edit>
-  <New>DocumentLibraryForm</New>
-</FormTemplates>
 </file>
 
 <file path=customXml/item3.xml><?xml version="1.0" encoding="utf-8"?>
@@ -31500,19 +31518,19 @@
 </file>
 
 <file path=customXml/itemProps1.xml><?xml version="1.0" encoding="utf-8"?>
+<ds:datastoreItem xmlns:ds="http://schemas.openxmlformats.org/officeDocument/2006/customXml" ds:itemID="{D6E1CB9A-5EC4-425A-85D0-28DD43E2C0C8}">
+  <ds:schemaRefs>
+    <ds:schemaRef ds:uri="http://schemas.microsoft.com/sharepoint/v3/contenttype/forms"/>
+  </ds:schemaRefs>
+</ds:datastoreItem>
+</file>
+
+<file path=customXml/itemProps2.xml><?xml version="1.0" encoding="utf-8"?>
 <ds:datastoreItem xmlns:ds="http://schemas.openxmlformats.org/officeDocument/2006/customXml" ds:itemID="{E9DDB195-2A36-4352-B80E-2793AA1BAD86}">
   <ds:schemaRefs>
     <ds:schemaRef ds:uri="http://schemas.microsoft.com/office/2006/metadata/properties"/>
     <ds:schemaRef ds:uri="http://schemas.microsoft.com/office/infopath/2007/PartnerControls"/>
     <ds:schemaRef ds:uri="6794D9DE-4FDF-4DC0-8B2C-5438320C69D5"/>
-  </ds:schemaRefs>
-</ds:datastoreItem>
-</file>
-
-<file path=customXml/itemProps2.xml><?xml version="1.0" encoding="utf-8"?>
-<ds:datastoreItem xmlns:ds="http://schemas.openxmlformats.org/officeDocument/2006/customXml" ds:itemID="{D6E1CB9A-5EC4-425A-85D0-28DD43E2C0C8}">
-  <ds:schemaRefs>
-    <ds:schemaRef ds:uri="http://schemas.microsoft.com/sharepoint/v3/contenttype/forms"/>
   </ds:schemaRefs>
 </ds:datastoreItem>
 </file>
